--- a/requirements-engineering/RE_Reserve_PVA5.pptx
+++ b/requirements-engineering/RE_Reserve_PVA5.pptx
@@ -111,14 +111,14 @@
   <p:extLst>
     <p:ext uri="{521415D9-36F7-43E2-AB2F-B90AF26B5E84}">
       <p14:sectionLst xmlns:p14="http://schemas.microsoft.com/office/powerpoint/2010/main">
-        <p14:section name="Reserve" id="{492cf7f1-86b9-fcfd-a204-de0901daaf84}">
+        <p14:section name="Reserve" id="{d9c8b8e2-1cba-71b8-9364-df82ff6f1c56}">
           <p14:sldIdLst>
             <p14:sldId id="256"/>
             <p14:sldId id="257"/>
             <p14:sldId id="258"/>
           </p14:sldIdLst>
         </p14:section>
-        <p14:section name="Ziele und Rahmen" id="{a4c8d6a8-1f68-29e0-a795-1b9cc74c2e78}">
+        <p14:section name="Ziele und Rahmen" id="{d407ec99-c74e-9f60-2001-46897c9824bb}">
           <p14:sldIdLst>
             <p14:sldId id="259"/>
             <p14:sldId id="260"/>
@@ -1732,7 +1732,7 @@
                   <a:schemeClr val="accent6"/>
                 </a:solidFill>
               </a:rPr>
-              <a:t>Requirements Engineering HS26 · Gruppe 9 · [Name 1], [Name 2], [Name 3]</a:t>
+              <a:t>Requirements Engineering HS26 · Gruppe 9 · Görkem Taspinar, Ardian Ibrahimaj</a:t>
             </a:r>
             <a:endParaRPr lang="en-US" sz="1200" dirty="0"/>
           </a:p>
